--- a/_posts/sequencing_v2/guide_seq_change_seq.pptx
+++ b/_posts/sequencing_v2/guide_seq_change_seq.pptx
@@ -15,6 +15,7 @@
     <p:sldId id="263" r:id="rId9"/>
     <p:sldId id="264" r:id="rId10"/>
     <p:sldId id="265" r:id="rId11"/>
+    <p:sldId id="266" r:id="rId12"/>
   </p:sldIdLst>
   <p:sldSz cx="12192000" cy="6858000"/>
   <p:notesSz cx="6858000" cy="9144000"/>
@@ -113,6 +114,11 @@
       </a:defRPr>
     </a:lvl9pPr>
   </p:defaultTextStyle>
+  <p:extLst>
+    <p:ext uri="{EFAFB233-063F-42B5-8137-9DF3F51BA10A}">
+      <p15:sldGuideLst xmlns:p15="http://schemas.microsoft.com/office/powerpoint/2012/main"/>
+    </p:ext>
+  </p:extLst>
 </p:presentation>
 </file>
 
@@ -263,7 +269,7 @@
           <a:p>
             <a:fld id="{537B82B2-ACAD-C742-A68A-8722A66FAD8F}" type="datetimeFigureOut">
               <a:rPr lang="en-US" smtClean="0"/>
-              <a:t>10/24/25</a:t>
+              <a:t>11/10/25</a:t>
             </a:fld>
             <a:endParaRPr lang="en-US"/>
           </a:p>
@@ -461,7 +467,7 @@
           <a:p>
             <a:fld id="{537B82B2-ACAD-C742-A68A-8722A66FAD8F}" type="datetimeFigureOut">
               <a:rPr lang="en-US" smtClean="0"/>
-              <a:t>10/24/25</a:t>
+              <a:t>11/10/25</a:t>
             </a:fld>
             <a:endParaRPr lang="en-US"/>
           </a:p>
@@ -669,7 +675,7 @@
           <a:p>
             <a:fld id="{537B82B2-ACAD-C742-A68A-8722A66FAD8F}" type="datetimeFigureOut">
               <a:rPr lang="en-US" smtClean="0"/>
-              <a:t>10/24/25</a:t>
+              <a:t>11/10/25</a:t>
             </a:fld>
             <a:endParaRPr lang="en-US"/>
           </a:p>
@@ -867,7 +873,7 @@
           <a:p>
             <a:fld id="{537B82B2-ACAD-C742-A68A-8722A66FAD8F}" type="datetimeFigureOut">
               <a:rPr lang="en-US" smtClean="0"/>
-              <a:t>10/24/25</a:t>
+              <a:t>11/10/25</a:t>
             </a:fld>
             <a:endParaRPr lang="en-US"/>
           </a:p>
@@ -1142,7 +1148,7 @@
           <a:p>
             <a:fld id="{537B82B2-ACAD-C742-A68A-8722A66FAD8F}" type="datetimeFigureOut">
               <a:rPr lang="en-US" smtClean="0"/>
-              <a:t>10/24/25</a:t>
+              <a:t>11/10/25</a:t>
             </a:fld>
             <a:endParaRPr lang="en-US"/>
           </a:p>
@@ -1407,7 +1413,7 @@
           <a:p>
             <a:fld id="{537B82B2-ACAD-C742-A68A-8722A66FAD8F}" type="datetimeFigureOut">
               <a:rPr lang="en-US" smtClean="0"/>
-              <a:t>10/24/25</a:t>
+              <a:t>11/10/25</a:t>
             </a:fld>
             <a:endParaRPr lang="en-US"/>
           </a:p>
@@ -1819,7 +1825,7 @@
           <a:p>
             <a:fld id="{537B82B2-ACAD-C742-A68A-8722A66FAD8F}" type="datetimeFigureOut">
               <a:rPr lang="en-US" smtClean="0"/>
-              <a:t>10/24/25</a:t>
+              <a:t>11/10/25</a:t>
             </a:fld>
             <a:endParaRPr lang="en-US"/>
           </a:p>
@@ -1960,7 +1966,7 @@
           <a:p>
             <a:fld id="{537B82B2-ACAD-C742-A68A-8722A66FAD8F}" type="datetimeFigureOut">
               <a:rPr lang="en-US" smtClean="0"/>
-              <a:t>10/24/25</a:t>
+              <a:t>11/10/25</a:t>
             </a:fld>
             <a:endParaRPr lang="en-US"/>
           </a:p>
@@ -2073,7 +2079,7 @@
           <a:p>
             <a:fld id="{537B82B2-ACAD-C742-A68A-8722A66FAD8F}" type="datetimeFigureOut">
               <a:rPr lang="en-US" smtClean="0"/>
-              <a:t>10/24/25</a:t>
+              <a:t>11/10/25</a:t>
             </a:fld>
             <a:endParaRPr lang="en-US"/>
           </a:p>
@@ -2384,7 +2390,7 @@
           <a:p>
             <a:fld id="{537B82B2-ACAD-C742-A68A-8722A66FAD8F}" type="datetimeFigureOut">
               <a:rPr lang="en-US" smtClean="0"/>
-              <a:t>10/24/25</a:t>
+              <a:t>11/10/25</a:t>
             </a:fld>
             <a:endParaRPr lang="en-US"/>
           </a:p>
@@ -2672,7 +2678,7 @@
           <a:p>
             <a:fld id="{537B82B2-ACAD-C742-A68A-8722A66FAD8F}" type="datetimeFigureOut">
               <a:rPr lang="en-US" smtClean="0"/>
-              <a:t>10/24/25</a:t>
+              <a:t>11/10/25</a:t>
             </a:fld>
             <a:endParaRPr lang="en-US"/>
           </a:p>
@@ -2913,7 +2919,7 @@
           <a:p>
             <a:fld id="{537B82B2-ACAD-C742-A68A-8722A66FAD8F}" type="datetimeFigureOut">
               <a:rPr lang="en-US" smtClean="0"/>
-              <a:t>10/24/25</a:t>
+              <a:t>11/10/25</a:t>
             </a:fld>
             <a:endParaRPr lang="en-US"/>
           </a:p>
@@ -4467,8 +4473,8 @@
           </a:fontRef>
         </p:style>
       </p:cxnSp>
-      <mc:AlternateContent xmlns:mc="http://schemas.openxmlformats.org/markup-compatibility/2006">
-        <mc:Choice xmlns:a14="http://schemas.microsoft.com/office/drawing/2010/main" Requires="a14">
+      <mc:AlternateContent xmlns:mc="http://schemas.openxmlformats.org/markup-compatibility/2006" xmlns:a14="http://schemas.microsoft.com/office/drawing/2010/main">
+        <mc:Choice Requires="a14">
           <p:sp>
             <p:nvSpPr>
               <p:cNvPr id="36" name="TextBox 35">
@@ -4525,7 +4531,7 @@
             </p:txBody>
           </p:sp>
         </mc:Choice>
-        <mc:Fallback>
+        <mc:Fallback xmlns="">
           <p:sp>
             <p:nvSpPr>
               <p:cNvPr id="36" name="TextBox 35">
@@ -5615,6 +5621,806 @@
     <p:extLst>
       <p:ext uri="{BB962C8B-B14F-4D97-AF65-F5344CB8AC3E}">
         <p14:creationId xmlns:p14="http://schemas.microsoft.com/office/powerpoint/2010/main" val="3706362094"/>
+      </p:ext>
+    </p:extLst>
+  </p:cSld>
+  <p:clrMapOvr>
+    <a:masterClrMapping/>
+  </p:clrMapOvr>
+</p:sld>
+</file>
+
+<file path=ppt/slides/slide11.xml><?xml version="1.0" encoding="utf-8"?>
+<p:sld xmlns:a="http://schemas.openxmlformats.org/drawingml/2006/main" xmlns:r="http://schemas.openxmlformats.org/officeDocument/2006/relationships" xmlns:p="http://schemas.openxmlformats.org/presentationml/2006/main">
+  <p:cSld>
+    <p:spTree>
+      <p:nvGrpSpPr>
+        <p:cNvPr id="1" name=""/>
+        <p:cNvGrpSpPr/>
+        <p:nvPr/>
+      </p:nvGrpSpPr>
+      <p:grpSpPr>
+        <a:xfrm>
+          <a:off x="0" y="0"/>
+          <a:ext cx="0" cy="0"/>
+          <a:chOff x="0" y="0"/>
+          <a:chExt cx="0" cy="0"/>
+        </a:xfrm>
+      </p:grpSpPr>
+      <p:sp>
+        <p:nvSpPr>
+          <p:cNvPr id="4" name="Rectangle 3">
+            <a:extLst>
+              <a:ext uri="{FF2B5EF4-FFF2-40B4-BE49-F238E27FC236}">
+                <a16:creationId xmlns:a16="http://schemas.microsoft.com/office/drawing/2014/main" id="{6279DFFB-6A02-268A-89D6-60F26273F08E}"/>
+              </a:ext>
+            </a:extLst>
+          </p:cNvPr>
+          <p:cNvSpPr/>
+          <p:nvPr/>
+        </p:nvSpPr>
+        <p:spPr>
+          <a:xfrm>
+            <a:off x="3588650" y="1756874"/>
+            <a:ext cx="1167203" cy="329425"/>
+          </a:xfrm>
+          <a:prstGeom prst="rect">
+            <a:avLst/>
+          </a:prstGeom>
+          <a:solidFill>
+            <a:srgbClr val="FF0000"/>
+          </a:solidFill>
+          <a:ln>
+            <a:noFill/>
+          </a:ln>
+        </p:spPr>
+        <p:style>
+          <a:lnRef idx="2">
+            <a:schemeClr val="accent1">
+              <a:shade val="15000"/>
+            </a:schemeClr>
+          </a:lnRef>
+          <a:fillRef idx="1">
+            <a:schemeClr val="accent1"/>
+          </a:fillRef>
+          <a:effectRef idx="0">
+            <a:schemeClr val="accent1"/>
+          </a:effectRef>
+          <a:fontRef idx="minor">
+            <a:schemeClr val="lt1"/>
+          </a:fontRef>
+        </p:style>
+        <p:txBody>
+          <a:bodyPr rtlCol="0" anchor="ctr"/>
+          <a:lstStyle/>
+          <a:p>
+            <a:pPr algn="ctr"/>
+            <a:endParaRPr lang="en-US" sz="1200" dirty="0"/>
+          </a:p>
+        </p:txBody>
+      </p:sp>
+      <p:sp>
+        <p:nvSpPr>
+          <p:cNvPr id="5" name="Rectangle 4">
+            <a:extLst>
+              <a:ext uri="{FF2B5EF4-FFF2-40B4-BE49-F238E27FC236}">
+                <a16:creationId xmlns:a16="http://schemas.microsoft.com/office/drawing/2014/main" id="{0C7344E0-E61A-D10E-6DFD-3049BA468CF7}"/>
+              </a:ext>
+            </a:extLst>
+          </p:cNvPr>
+          <p:cNvSpPr/>
+          <p:nvPr/>
+        </p:nvSpPr>
+        <p:spPr>
+          <a:xfrm>
+            <a:off x="4755853" y="1756874"/>
+            <a:ext cx="770419" cy="329425"/>
+          </a:xfrm>
+          <a:prstGeom prst="rect">
+            <a:avLst/>
+          </a:prstGeom>
+          <a:solidFill>
+            <a:srgbClr val="92D050"/>
+          </a:solidFill>
+          <a:ln>
+            <a:noFill/>
+          </a:ln>
+        </p:spPr>
+        <p:style>
+          <a:lnRef idx="2">
+            <a:schemeClr val="accent1">
+              <a:shade val="15000"/>
+            </a:schemeClr>
+          </a:lnRef>
+          <a:fillRef idx="1">
+            <a:schemeClr val="accent1"/>
+          </a:fillRef>
+          <a:effectRef idx="0">
+            <a:schemeClr val="accent1"/>
+          </a:effectRef>
+          <a:fontRef idx="minor">
+            <a:schemeClr val="lt1"/>
+          </a:fontRef>
+        </p:style>
+        <p:txBody>
+          <a:bodyPr rtlCol="0" anchor="ctr"/>
+          <a:lstStyle/>
+          <a:p>
+            <a:pPr algn="ctr"/>
+            <a:endParaRPr lang="en-US" sz="1200" dirty="0"/>
+          </a:p>
+        </p:txBody>
+      </p:sp>
+      <p:sp>
+        <p:nvSpPr>
+          <p:cNvPr id="6" name="Rectangle 5">
+            <a:extLst>
+              <a:ext uri="{FF2B5EF4-FFF2-40B4-BE49-F238E27FC236}">
+                <a16:creationId xmlns:a16="http://schemas.microsoft.com/office/drawing/2014/main" id="{48416D7E-8F2A-941D-FF53-AF57BA120519}"/>
+              </a:ext>
+            </a:extLst>
+          </p:cNvPr>
+          <p:cNvSpPr/>
+          <p:nvPr/>
+        </p:nvSpPr>
+        <p:spPr>
+          <a:xfrm>
+            <a:off x="5526272" y="1756874"/>
+            <a:ext cx="770419" cy="329425"/>
+          </a:xfrm>
+          <a:prstGeom prst="rect">
+            <a:avLst/>
+          </a:prstGeom>
+          <a:solidFill>
+            <a:srgbClr val="002060"/>
+          </a:solidFill>
+          <a:ln>
+            <a:noFill/>
+          </a:ln>
+        </p:spPr>
+        <p:style>
+          <a:lnRef idx="2">
+            <a:schemeClr val="accent1">
+              <a:shade val="15000"/>
+            </a:schemeClr>
+          </a:lnRef>
+          <a:fillRef idx="1">
+            <a:schemeClr val="accent1"/>
+          </a:fillRef>
+          <a:effectRef idx="0">
+            <a:schemeClr val="accent1"/>
+          </a:effectRef>
+          <a:fontRef idx="minor">
+            <a:schemeClr val="lt1"/>
+          </a:fontRef>
+        </p:style>
+        <p:txBody>
+          <a:bodyPr rtlCol="0" anchor="ctr"/>
+          <a:lstStyle/>
+          <a:p>
+            <a:pPr algn="ctr"/>
+            <a:endParaRPr lang="en-US" sz="1200" dirty="0"/>
+          </a:p>
+        </p:txBody>
+      </p:sp>
+      <p:sp>
+        <p:nvSpPr>
+          <p:cNvPr id="10" name="Rectangle 9">
+            <a:extLst>
+              <a:ext uri="{FF2B5EF4-FFF2-40B4-BE49-F238E27FC236}">
+                <a16:creationId xmlns:a16="http://schemas.microsoft.com/office/drawing/2014/main" id="{1AF491DB-8130-953D-75A0-2DCF88EE4FFD}"/>
+              </a:ext>
+            </a:extLst>
+          </p:cNvPr>
+          <p:cNvSpPr/>
+          <p:nvPr/>
+        </p:nvSpPr>
+        <p:spPr>
+          <a:xfrm>
+            <a:off x="2949343" y="1756874"/>
+            <a:ext cx="639307" cy="329425"/>
+          </a:xfrm>
+          <a:prstGeom prst="rect">
+            <a:avLst/>
+          </a:prstGeom>
+          <a:solidFill>
+            <a:schemeClr val="bg2">
+              <a:lumMod val="75000"/>
+            </a:schemeClr>
+          </a:solidFill>
+          <a:ln>
+            <a:noFill/>
+          </a:ln>
+        </p:spPr>
+        <p:style>
+          <a:lnRef idx="2">
+            <a:schemeClr val="accent1">
+              <a:shade val="15000"/>
+            </a:schemeClr>
+          </a:lnRef>
+          <a:fillRef idx="1">
+            <a:schemeClr val="accent1"/>
+          </a:fillRef>
+          <a:effectRef idx="0">
+            <a:schemeClr val="accent1"/>
+          </a:effectRef>
+          <a:fontRef idx="minor">
+            <a:schemeClr val="lt1"/>
+          </a:fontRef>
+        </p:style>
+        <p:txBody>
+          <a:bodyPr rtlCol="0" anchor="ctr"/>
+          <a:lstStyle/>
+          <a:p>
+            <a:pPr algn="ctr"/>
+            <a:endParaRPr lang="en-US" sz="1200" dirty="0"/>
+          </a:p>
+        </p:txBody>
+      </p:sp>
+      <p:sp>
+        <p:nvSpPr>
+          <p:cNvPr id="12" name="Rectangle 11">
+            <a:extLst>
+              <a:ext uri="{FF2B5EF4-FFF2-40B4-BE49-F238E27FC236}">
+                <a16:creationId xmlns:a16="http://schemas.microsoft.com/office/drawing/2014/main" id="{66E5C09D-6C04-C6E3-B010-FE013E856AC8}"/>
+              </a:ext>
+            </a:extLst>
+          </p:cNvPr>
+          <p:cNvSpPr/>
+          <p:nvPr/>
+        </p:nvSpPr>
+        <p:spPr>
+          <a:xfrm>
+            <a:off x="2310044" y="1756874"/>
+            <a:ext cx="639297" cy="329425"/>
+          </a:xfrm>
+          <a:prstGeom prst="rect">
+            <a:avLst/>
+          </a:prstGeom>
+          <a:solidFill>
+            <a:srgbClr val="00B0F0"/>
+          </a:solidFill>
+          <a:ln>
+            <a:noFill/>
+          </a:ln>
+        </p:spPr>
+        <p:style>
+          <a:lnRef idx="2">
+            <a:schemeClr val="accent1">
+              <a:shade val="15000"/>
+            </a:schemeClr>
+          </a:lnRef>
+          <a:fillRef idx="1">
+            <a:schemeClr val="accent1"/>
+          </a:fillRef>
+          <a:effectRef idx="0">
+            <a:schemeClr val="accent1"/>
+          </a:effectRef>
+          <a:fontRef idx="minor">
+            <a:schemeClr val="lt1"/>
+          </a:fontRef>
+        </p:style>
+        <p:txBody>
+          <a:bodyPr rtlCol="0" anchor="ctr"/>
+          <a:lstStyle/>
+          <a:p>
+            <a:pPr algn="ctr"/>
+            <a:endParaRPr lang="en-US" sz="1200" dirty="0"/>
+          </a:p>
+        </p:txBody>
+      </p:sp>
+      <p:cxnSp>
+        <p:nvCxnSpPr>
+          <p:cNvPr id="13" name="Straight Arrow Connector 12">
+            <a:extLst>
+              <a:ext uri="{FF2B5EF4-FFF2-40B4-BE49-F238E27FC236}">
+                <a16:creationId xmlns:a16="http://schemas.microsoft.com/office/drawing/2014/main" id="{8BA6F8E0-4842-55B3-054D-53B57B1CD838}"/>
+              </a:ext>
+            </a:extLst>
+          </p:cNvPr>
+          <p:cNvCxnSpPr>
+            <a:cxnSpLocks/>
+          </p:cNvCxnSpPr>
+          <p:nvPr/>
+        </p:nvCxnSpPr>
+        <p:spPr>
+          <a:xfrm>
+            <a:off x="2682094" y="2102781"/>
+            <a:ext cx="0" cy="446315"/>
+          </a:xfrm>
+          <a:prstGeom prst="straightConnector1">
+            <a:avLst/>
+          </a:prstGeom>
+          <a:ln>
+            <a:tailEnd type="triangle"/>
+          </a:ln>
+        </p:spPr>
+        <p:style>
+          <a:lnRef idx="2">
+            <a:schemeClr val="dk1"/>
+          </a:lnRef>
+          <a:fillRef idx="0">
+            <a:schemeClr val="dk1"/>
+          </a:fillRef>
+          <a:effectRef idx="1">
+            <a:schemeClr val="dk1"/>
+          </a:effectRef>
+          <a:fontRef idx="minor">
+            <a:schemeClr val="tx1"/>
+          </a:fontRef>
+        </p:style>
+      </p:cxnSp>
+      <p:cxnSp>
+        <p:nvCxnSpPr>
+          <p:cNvPr id="14" name="Straight Arrow Connector 13">
+            <a:extLst>
+              <a:ext uri="{FF2B5EF4-FFF2-40B4-BE49-F238E27FC236}">
+                <a16:creationId xmlns:a16="http://schemas.microsoft.com/office/drawing/2014/main" id="{DB2B9DDA-51F5-637D-4BF7-059002B1DC45}"/>
+              </a:ext>
+            </a:extLst>
+          </p:cNvPr>
+          <p:cNvCxnSpPr>
+            <a:cxnSpLocks/>
+          </p:cNvCxnSpPr>
+          <p:nvPr/>
+        </p:nvCxnSpPr>
+        <p:spPr>
+          <a:xfrm>
+            <a:off x="4241705" y="2102781"/>
+            <a:ext cx="0" cy="815647"/>
+          </a:xfrm>
+          <a:prstGeom prst="straightConnector1">
+            <a:avLst/>
+          </a:prstGeom>
+          <a:ln>
+            <a:tailEnd type="triangle"/>
+          </a:ln>
+        </p:spPr>
+        <p:style>
+          <a:lnRef idx="2">
+            <a:schemeClr val="dk1"/>
+          </a:lnRef>
+          <a:fillRef idx="0">
+            <a:schemeClr val="dk1"/>
+          </a:fillRef>
+          <a:effectRef idx="1">
+            <a:schemeClr val="dk1"/>
+          </a:effectRef>
+          <a:fontRef idx="minor">
+            <a:schemeClr val="tx1"/>
+          </a:fontRef>
+        </p:style>
+      </p:cxnSp>
+      <p:cxnSp>
+        <p:nvCxnSpPr>
+          <p:cNvPr id="15" name="Straight Arrow Connector 14">
+            <a:extLst>
+              <a:ext uri="{FF2B5EF4-FFF2-40B4-BE49-F238E27FC236}">
+                <a16:creationId xmlns:a16="http://schemas.microsoft.com/office/drawing/2014/main" id="{AA8CB771-30B4-E2C5-CA49-F61464FE0F83}"/>
+              </a:ext>
+            </a:extLst>
+          </p:cNvPr>
+          <p:cNvCxnSpPr>
+            <a:cxnSpLocks/>
+          </p:cNvCxnSpPr>
+          <p:nvPr/>
+        </p:nvCxnSpPr>
+        <p:spPr>
+          <a:xfrm>
+            <a:off x="5963361" y="2102781"/>
+            <a:ext cx="0" cy="446315"/>
+          </a:xfrm>
+          <a:prstGeom prst="straightConnector1">
+            <a:avLst/>
+          </a:prstGeom>
+          <a:ln>
+            <a:tailEnd type="triangle"/>
+          </a:ln>
+        </p:spPr>
+        <p:style>
+          <a:lnRef idx="2">
+            <a:schemeClr val="dk1"/>
+          </a:lnRef>
+          <a:fillRef idx="0">
+            <a:schemeClr val="dk1"/>
+          </a:fillRef>
+          <a:effectRef idx="1">
+            <a:schemeClr val="dk1"/>
+          </a:effectRef>
+          <a:fontRef idx="minor">
+            <a:schemeClr val="tx1"/>
+          </a:fontRef>
+        </p:style>
+      </p:cxnSp>
+      <p:sp>
+        <p:nvSpPr>
+          <p:cNvPr id="16" name="TextBox 15">
+            <a:extLst>
+              <a:ext uri="{FF2B5EF4-FFF2-40B4-BE49-F238E27FC236}">
+                <a16:creationId xmlns:a16="http://schemas.microsoft.com/office/drawing/2014/main" id="{5D5D5FF1-C462-E0C3-1A35-B4B08E0A5229}"/>
+              </a:ext>
+            </a:extLst>
+          </p:cNvPr>
+          <p:cNvSpPr txBox="1"/>
+          <p:nvPr/>
+        </p:nvSpPr>
+        <p:spPr>
+          <a:xfrm>
+            <a:off x="1986568" y="2549096"/>
+            <a:ext cx="1514004" cy="369332"/>
+          </a:xfrm>
+          <a:prstGeom prst="rect">
+            <a:avLst/>
+          </a:prstGeom>
+          <a:noFill/>
+        </p:spPr>
+        <p:txBody>
+          <a:bodyPr wrap="none" rtlCol="0">
+            <a:spAutoFit/>
+          </a:bodyPr>
+          <a:lstStyle/>
+          <a:p>
+            <a:r>
+              <a:rPr lang="en-US" dirty="0"/>
+              <a:t>NGS adapter</a:t>
+            </a:r>
+          </a:p>
+        </p:txBody>
+      </p:sp>
+      <p:sp>
+        <p:nvSpPr>
+          <p:cNvPr id="17" name="TextBox 16">
+            <a:extLst>
+              <a:ext uri="{FF2B5EF4-FFF2-40B4-BE49-F238E27FC236}">
+                <a16:creationId xmlns:a16="http://schemas.microsoft.com/office/drawing/2014/main" id="{F0482A20-4CA6-CFE2-8B40-9F3D62919DED}"/>
+              </a:ext>
+            </a:extLst>
+          </p:cNvPr>
+          <p:cNvSpPr txBox="1"/>
+          <p:nvPr/>
+        </p:nvSpPr>
+        <p:spPr>
+          <a:xfrm>
+            <a:off x="5283271" y="2549096"/>
+            <a:ext cx="1514004" cy="369332"/>
+          </a:xfrm>
+          <a:prstGeom prst="rect">
+            <a:avLst/>
+          </a:prstGeom>
+          <a:noFill/>
+        </p:spPr>
+        <p:txBody>
+          <a:bodyPr wrap="none" rtlCol="0">
+            <a:spAutoFit/>
+          </a:bodyPr>
+          <a:lstStyle/>
+          <a:p>
+            <a:r>
+              <a:rPr lang="en-US" dirty="0"/>
+              <a:t>NGS adapter</a:t>
+            </a:r>
+          </a:p>
+        </p:txBody>
+      </p:sp>
+      <p:sp>
+        <p:nvSpPr>
+          <p:cNvPr id="18" name="TextBox 17">
+            <a:extLst>
+              <a:ext uri="{FF2B5EF4-FFF2-40B4-BE49-F238E27FC236}">
+                <a16:creationId xmlns:a16="http://schemas.microsoft.com/office/drawing/2014/main" id="{1DE00AA6-F607-4BD5-8F3B-024F7C692C65}"/>
+              </a:ext>
+            </a:extLst>
+          </p:cNvPr>
+          <p:cNvSpPr txBox="1"/>
+          <p:nvPr/>
+        </p:nvSpPr>
+        <p:spPr>
+          <a:xfrm>
+            <a:off x="3202012" y="2995411"/>
+            <a:ext cx="2234073" cy="369332"/>
+          </a:xfrm>
+          <a:prstGeom prst="rect">
+            <a:avLst/>
+          </a:prstGeom>
+          <a:noFill/>
+        </p:spPr>
+        <p:txBody>
+          <a:bodyPr wrap="none" rtlCol="0">
+            <a:spAutoFit/>
+          </a:bodyPr>
+          <a:lstStyle/>
+          <a:p>
+            <a:r>
+              <a:rPr lang="en-US" dirty="0"/>
+              <a:t>Sequence of interest</a:t>
+            </a:r>
+          </a:p>
+        </p:txBody>
+      </p:sp>
+      <p:cxnSp>
+        <p:nvCxnSpPr>
+          <p:cNvPr id="20" name="Straight Arrow Connector 19">
+            <a:extLst>
+              <a:ext uri="{FF2B5EF4-FFF2-40B4-BE49-F238E27FC236}">
+                <a16:creationId xmlns:a16="http://schemas.microsoft.com/office/drawing/2014/main" id="{244823AA-023D-E143-CC45-B46919C8C5D2}"/>
+              </a:ext>
+            </a:extLst>
+          </p:cNvPr>
+          <p:cNvCxnSpPr>
+            <a:cxnSpLocks/>
+          </p:cNvCxnSpPr>
+          <p:nvPr/>
+        </p:nvCxnSpPr>
+        <p:spPr>
+          <a:xfrm flipV="1">
+            <a:off x="3278344" y="1254177"/>
+            <a:ext cx="0" cy="502698"/>
+          </a:xfrm>
+          <a:prstGeom prst="straightConnector1">
+            <a:avLst/>
+          </a:prstGeom>
+          <a:ln>
+            <a:tailEnd type="triangle"/>
+          </a:ln>
+        </p:spPr>
+        <p:style>
+          <a:lnRef idx="2">
+            <a:schemeClr val="dk1"/>
+          </a:lnRef>
+          <a:fillRef idx="0">
+            <a:schemeClr val="dk1"/>
+          </a:fillRef>
+          <a:effectRef idx="1">
+            <a:schemeClr val="dk1"/>
+          </a:effectRef>
+          <a:fontRef idx="minor">
+            <a:schemeClr val="tx1"/>
+          </a:fontRef>
+        </p:style>
+      </p:cxnSp>
+      <p:cxnSp>
+        <p:nvCxnSpPr>
+          <p:cNvPr id="22" name="Straight Arrow Connector 21">
+            <a:extLst>
+              <a:ext uri="{FF2B5EF4-FFF2-40B4-BE49-F238E27FC236}">
+                <a16:creationId xmlns:a16="http://schemas.microsoft.com/office/drawing/2014/main" id="{C8F58EE2-E22B-40ED-B999-9A940D2F8454}"/>
+              </a:ext>
+            </a:extLst>
+          </p:cNvPr>
+          <p:cNvCxnSpPr>
+            <a:cxnSpLocks/>
+            <a:stCxn id="5" idx="0"/>
+          </p:cNvCxnSpPr>
+          <p:nvPr/>
+        </p:nvCxnSpPr>
+        <p:spPr>
+          <a:xfrm flipH="1" flipV="1">
+            <a:off x="5141062" y="1254177"/>
+            <a:ext cx="1" cy="502697"/>
+          </a:xfrm>
+          <a:prstGeom prst="straightConnector1">
+            <a:avLst/>
+          </a:prstGeom>
+          <a:ln>
+            <a:tailEnd type="triangle"/>
+          </a:ln>
+        </p:spPr>
+        <p:style>
+          <a:lnRef idx="2">
+            <a:schemeClr val="dk1"/>
+          </a:lnRef>
+          <a:fillRef idx="0">
+            <a:schemeClr val="dk1"/>
+          </a:fillRef>
+          <a:effectRef idx="1">
+            <a:schemeClr val="dk1"/>
+          </a:effectRef>
+          <a:fontRef idx="minor">
+            <a:schemeClr val="tx1"/>
+          </a:fontRef>
+        </p:style>
+      </p:cxnSp>
+      <p:sp>
+        <p:nvSpPr>
+          <p:cNvPr id="24" name="TextBox 23">
+            <a:extLst>
+              <a:ext uri="{FF2B5EF4-FFF2-40B4-BE49-F238E27FC236}">
+                <a16:creationId xmlns:a16="http://schemas.microsoft.com/office/drawing/2014/main" id="{D35C85AF-75D1-8461-840A-BB7501F00486}"/>
+              </a:ext>
+            </a:extLst>
+          </p:cNvPr>
+          <p:cNvSpPr txBox="1"/>
+          <p:nvPr/>
+        </p:nvSpPr>
+        <p:spPr>
+          <a:xfrm>
+            <a:off x="2605400" y="924745"/>
+            <a:ext cx="1351652" cy="369332"/>
+          </a:xfrm>
+          <a:prstGeom prst="rect">
+            <a:avLst/>
+          </a:prstGeom>
+          <a:noFill/>
+        </p:spPr>
+        <p:txBody>
+          <a:bodyPr wrap="none" rtlCol="0">
+            <a:spAutoFit/>
+          </a:bodyPr>
+          <a:lstStyle/>
+          <a:p>
+            <a:r>
+              <a:rPr lang="en-US" dirty="0"/>
+              <a:t>PCR handle</a:t>
+            </a:r>
+          </a:p>
+        </p:txBody>
+      </p:sp>
+      <p:sp>
+        <p:nvSpPr>
+          <p:cNvPr id="25" name="TextBox 24">
+            <a:extLst>
+              <a:ext uri="{FF2B5EF4-FFF2-40B4-BE49-F238E27FC236}">
+                <a16:creationId xmlns:a16="http://schemas.microsoft.com/office/drawing/2014/main" id="{B44559E3-AC22-DA3B-6EBA-834CCABCFFBD}"/>
+              </a:ext>
+            </a:extLst>
+          </p:cNvPr>
+          <p:cNvSpPr txBox="1"/>
+          <p:nvPr/>
+        </p:nvSpPr>
+        <p:spPr>
+          <a:xfrm>
+            <a:off x="4465236" y="895264"/>
+            <a:ext cx="1351652" cy="369332"/>
+          </a:xfrm>
+          <a:prstGeom prst="rect">
+            <a:avLst/>
+          </a:prstGeom>
+          <a:noFill/>
+        </p:spPr>
+        <p:txBody>
+          <a:bodyPr wrap="none" rtlCol="0">
+            <a:spAutoFit/>
+          </a:bodyPr>
+          <a:lstStyle/>
+          <a:p>
+            <a:r>
+              <a:rPr lang="en-US" dirty="0"/>
+              <a:t>PCR handle</a:t>
+            </a:r>
+          </a:p>
+        </p:txBody>
+      </p:sp>
+      <p:cxnSp>
+        <p:nvCxnSpPr>
+          <p:cNvPr id="27" name="Straight Arrow Connector 26">
+            <a:extLst>
+              <a:ext uri="{FF2B5EF4-FFF2-40B4-BE49-F238E27FC236}">
+                <a16:creationId xmlns:a16="http://schemas.microsoft.com/office/drawing/2014/main" id="{24FD6F2F-86FE-35E9-985A-620E4B787436}"/>
+              </a:ext>
+            </a:extLst>
+          </p:cNvPr>
+          <p:cNvCxnSpPr>
+            <a:cxnSpLocks/>
+          </p:cNvCxnSpPr>
+          <p:nvPr/>
+        </p:nvCxnSpPr>
+        <p:spPr>
+          <a:xfrm>
+            <a:off x="2949341" y="1841216"/>
+            <a:ext cx="2862391" cy="0"/>
+          </a:xfrm>
+          <a:prstGeom prst="straightConnector1">
+            <a:avLst/>
+          </a:prstGeom>
+          <a:ln>
+            <a:solidFill>
+              <a:srgbClr val="FFC000"/>
+            </a:solidFill>
+            <a:tailEnd type="triangle"/>
+          </a:ln>
+        </p:spPr>
+        <p:style>
+          <a:lnRef idx="2">
+            <a:schemeClr val="accent1"/>
+          </a:lnRef>
+          <a:fillRef idx="0">
+            <a:schemeClr val="accent1"/>
+          </a:fillRef>
+          <a:effectRef idx="1">
+            <a:schemeClr val="accent1"/>
+          </a:effectRef>
+          <a:fontRef idx="minor">
+            <a:schemeClr val="tx1"/>
+          </a:fontRef>
+        </p:style>
+      </p:cxnSp>
+      <p:cxnSp>
+        <p:nvCxnSpPr>
+          <p:cNvPr id="31" name="Straight Arrow Connector 30">
+            <a:extLst>
+              <a:ext uri="{FF2B5EF4-FFF2-40B4-BE49-F238E27FC236}">
+                <a16:creationId xmlns:a16="http://schemas.microsoft.com/office/drawing/2014/main" id="{799EFF7D-7A98-3B08-08FF-CD6FDD80144E}"/>
+              </a:ext>
+            </a:extLst>
+          </p:cNvPr>
+          <p:cNvCxnSpPr>
+            <a:cxnSpLocks/>
+          </p:cNvCxnSpPr>
+          <p:nvPr/>
+        </p:nvCxnSpPr>
+        <p:spPr>
+          <a:xfrm flipH="1">
+            <a:off x="2785929" y="1976524"/>
+            <a:ext cx="2731797" cy="0"/>
+          </a:xfrm>
+          <a:prstGeom prst="straightConnector1">
+            <a:avLst/>
+          </a:prstGeom>
+          <a:ln>
+            <a:solidFill>
+              <a:srgbClr val="FFC000"/>
+            </a:solidFill>
+            <a:tailEnd type="triangle"/>
+          </a:ln>
+        </p:spPr>
+        <p:style>
+          <a:lnRef idx="2">
+            <a:schemeClr val="accent1"/>
+          </a:lnRef>
+          <a:fillRef idx="0">
+            <a:schemeClr val="accent1"/>
+          </a:fillRef>
+          <a:effectRef idx="1">
+            <a:schemeClr val="accent1"/>
+          </a:effectRef>
+          <a:fontRef idx="minor">
+            <a:schemeClr val="tx1"/>
+          </a:fontRef>
+        </p:style>
+      </p:cxnSp>
+      <p:sp>
+        <p:nvSpPr>
+          <p:cNvPr id="34" name="TextBox 33">
+            <a:extLst>
+              <a:ext uri="{FF2B5EF4-FFF2-40B4-BE49-F238E27FC236}">
+                <a16:creationId xmlns:a16="http://schemas.microsoft.com/office/drawing/2014/main" id="{7463F5F8-623F-6A34-3DFD-88C1063B1D2C}"/>
+              </a:ext>
+            </a:extLst>
+          </p:cNvPr>
+          <p:cNvSpPr txBox="1"/>
+          <p:nvPr/>
+        </p:nvSpPr>
+        <p:spPr>
+          <a:xfrm>
+            <a:off x="6329214" y="1736920"/>
+            <a:ext cx="1837426" cy="369332"/>
+          </a:xfrm>
+          <a:prstGeom prst="rect">
+            <a:avLst/>
+          </a:prstGeom>
+          <a:noFill/>
+        </p:spPr>
+        <p:txBody>
+          <a:bodyPr wrap="none" rtlCol="0">
+            <a:spAutoFit/>
+          </a:bodyPr>
+          <a:lstStyle/>
+          <a:p>
+            <a:r>
+              <a:rPr lang="en-US" dirty="0">
+                <a:solidFill>
+                  <a:srgbClr val="FFC000"/>
+                </a:solidFill>
+              </a:rPr>
+              <a:t>R1 and R2 reads</a:t>
+            </a:r>
+          </a:p>
+        </p:txBody>
+      </p:sp>
+    </p:spTree>
+    <p:extLst>
+      <p:ext uri="{BB962C8B-B14F-4D97-AF65-F5344CB8AC3E}">
+        <p14:creationId xmlns:p14="http://schemas.microsoft.com/office/powerpoint/2010/main" val="3124646982"/>
       </p:ext>
     </p:extLst>
   </p:cSld>
